--- a/docs/Presentation.pptx
+++ b/docs/Presentation.pptx
@@ -3813,49 +3813,56 @@
             <a:pPr/>
             <a:r>
               <a:rPr sz="1800"/>
-              <a:t>Three flows authored as Maestro YAML scripts:</a:t>
+              <a:t>Functional flows authored as Maestro YAML scripts:</a:t>
             </a:r>
           </a:p>
           <a:p>
             <a:pPr lvl="1"/>
             <a:r>
               <a:rPr sz="1800"/>
-              <a:t>YemekSepetiSearch.yaml — address &amp; restaurant search</a:t>
+              <a:t>Location Management — saved address + new address creation</a:t>
             </a:r>
           </a:p>
           <a:p>
             <a:pPr lvl="1"/>
             <a:r>
               <a:rPr sz="1800"/>
-              <a:t>YemekSepetiCartTest.yaml — add / increment / decrement / remove</a:t>
+              <a:t>Cart Operations — add, increase, decrease, remove (4 actions)</a:t>
             </a:r>
           </a:p>
           <a:p>
             <a:pPr lvl="1"/>
             <a:r>
               <a:rPr sz="1800"/>
-              <a:t>YemekSepetiPayTest.yaml — address book + payment selectors</a:t>
+              <a:t>Search — restaurant-based and food-based queries</a:t>
+            </a:r>
+          </a:p>
+          <a:p>
+            <a:pPr lvl="1"/>
+            <a:r>
+              <a:rPr sz="1800"/>
+              <a:t>Payment — Credit Card, POS at the door, Cash</a:t>
             </a:r>
           </a:p>
           <a:p>
             <a:pPr/>
             <a:r>
               <a:rPr sz="1800"/>
-              <a:t>Run on a physical Android device via ADB.</a:t>
+              <a:t>Run on a physical Android device via ADB; selectors anchored on Maestro IDs.</a:t>
             </a:r>
           </a:p>
           <a:p>
             <a:pPr/>
             <a:r>
               <a:rPr sz="1800"/>
-              <a:t>Selectors anchored on Maestro element IDs (HomeSearchBar, AUTOCOMPLETE_SUGGESTION_ENTRY).</a:t>
-            </a:r>
-          </a:p>
-          <a:p>
-            <a:pPr/>
-            <a:r>
-              <a:rPr sz="1800"/>
-              <a:t>Assertions cover navigation, visible text, and cart totals.</a:t>
+              <a:t>Authentication blocked: Login / Register screens are anti-screenshot (black inside Maestro).</a:t>
+            </a:r>
+          </a:p>
+          <a:p>
+            <a:pPr lvl="1"/>
+            <a:r>
+              <a:rPr sz="1800"/>
+              <a:t>Resolution: guest / pre-authenticated sessions used to verify the remaining modules.</a:t>
             </a:r>
           </a:p>
         </p:txBody>
@@ -3895,7 +3902,7 @@
           <a:p>
             <a:r>
               <a:rPr b="1"/>
-              <a:t>WEB TESTS — Playwright/JUnit Results</a:t>
+              <a:t>WEB TESTS — Playwright/JUnit Results (run 2026-05-08)</a:t>
             </a:r>
           </a:p>
         </p:txBody>
@@ -3925,7 +3932,7 @@
             <a:pPr algn="l"/>
             <a:r>
               <a:rPr sz="1600" b="0"/>
-              <a:t>Run on 2026-05-07, Chrome 148, persistent profile, locale tr-TR.</a:t>
+              <a:t>Run 2026-05-08 02:54–03:01, Chrome 148, persistent CDP profile, locale tr-TR.</a:t>
             </a:r>
           </a:p>
         </p:txBody>
@@ -3962,12 +3969,7 @@
                     <a:lstStyle/>
                     <a:p>
                       <a:r>
-                        <a:rPr b="1" sz="1200">
-                          <a:solidFill>
-                            <a:srgbClr val="FFFFFF"/>
-                          </a:solidFill>
-                        </a:rPr>
-                        <a:t>#</a:t>
+                        <a:t>Class</a:t>
                       </a:r>
                     </a:p>
                   </a:txBody>
@@ -3983,12 +3985,7 @@
                     <a:lstStyle/>
                     <a:p>
                       <a:r>
-                        <a:rPr b="1" sz="1200">
-                          <a:solidFill>
-                            <a:srgbClr val="FFFFFF"/>
-                          </a:solidFill>
-                        </a:rPr>
-                        <a:t>Test class</a:t>
+                        <a:t>Tests</a:t>
                       </a:r>
                     </a:p>
                   </a:txBody>
@@ -4004,12 +4001,7 @@
                     <a:lstStyle/>
                     <a:p>
                       <a:r>
-                        <a:rPr b="1" sz="1200">
-                          <a:solidFill>
-                            <a:srgbClr val="FFFFFF"/>
-                          </a:solidFill>
-                        </a:rPr>
-                        <a:t>Method</a:t>
+                        <a:t>Pass</a:t>
                       </a:r>
                     </a:p>
                   </a:txBody>
@@ -4025,12 +4017,7 @@
                     <a:lstStyle/>
                     <a:p>
                       <a:r>
-                        <a:rPr b="1" sz="1200">
-                          <a:solidFill>
-                            <a:srgbClr val="FFFFFF"/>
-                          </a:solidFill>
-                        </a:rPr>
-                        <a:t>Result</a:t>
+                        <a:t>Fail</a:t>
                       </a:r>
                     </a:p>
                   </a:txBody>
@@ -4046,12 +4033,7 @@
                     <a:lstStyle/>
                     <a:p>
                       <a:r>
-                        <a:rPr b="1" sz="1200">
-                          <a:solidFill>
-                            <a:srgbClr val="FFFFFF"/>
-                          </a:solidFill>
-                        </a:rPr>
-                        <a:t>Time</a:t>
+                        <a:t>Error</a:t>
                       </a:r>
                     </a:p>
                   </a:txBody>
@@ -4069,60 +4051,55 @@
                     <a:lstStyle/>
                     <a:p>
                       <a:r>
-                        <a:rPr sz="1100"/>
-                        <a:t>1</a:t>
-                      </a:r>
-                    </a:p>
-                  </a:txBody>
-                  <a:tcPr/>
-                </a:tc>
-                <a:tc>
-                  <a:txBody>
-                    <a:bodyPr/>
-                    <a:lstStyle/>
-                    <a:p>
-                      <a:r>
-                        <a:rPr sz="1100"/>
-                        <a:t>YemekSepetiSearchTest</a:t>
-                      </a:r>
-                    </a:p>
-                  </a:txBody>
-                  <a:tcPr/>
-                </a:tc>
-                <a:tc>
-                  <a:txBody>
-                    <a:bodyPr/>
-                    <a:lstStyle/>
-                    <a:p>
-                      <a:r>
-                        <a:rPr sz="1100"/>
-                        <a:t>scenario1_addressSuggestionAndRestaurantDetail</a:t>
-                      </a:r>
-                    </a:p>
-                  </a:txBody>
-                  <a:tcPr/>
-                </a:tc>
-                <a:tc>
-                  <a:txBody>
-                    <a:bodyPr/>
-                    <a:lstStyle/>
-                    <a:p>
-                      <a:r>
-                        <a:rPr sz="1100"/>
-                        <a:t>PASS</a:t>
-                      </a:r>
-                    </a:p>
-                  </a:txBody>
-                  <a:tcPr/>
-                </a:tc>
-                <a:tc>
-                  <a:txBody>
-                    <a:bodyPr/>
-                    <a:lstStyle/>
-                    <a:p>
-                      <a:r>
-                        <a:rPr sz="1100"/>
-                        <a:t>~26 s</a:t>
+                        <a:t>YemekSepetiLoginTest</a:t>
+                      </a:r>
+                    </a:p>
+                  </a:txBody>
+                  <a:tcPr/>
+                </a:tc>
+                <a:tc>
+                  <a:txBody>
+                    <a:bodyPr/>
+                    <a:lstStyle/>
+                    <a:p>
+                      <a:r>
+                        <a:t>2</a:t>
+                      </a:r>
+                    </a:p>
+                  </a:txBody>
+                  <a:tcPr/>
+                </a:tc>
+                <a:tc>
+                  <a:txBody>
+                    <a:bodyPr/>
+                    <a:lstStyle/>
+                    <a:p>
+                      <a:r>
+                        <a:t>2</a:t>
+                      </a:r>
+                    </a:p>
+                  </a:txBody>
+                  <a:tcPr/>
+                </a:tc>
+                <a:tc>
+                  <a:txBody>
+                    <a:bodyPr/>
+                    <a:lstStyle/>
+                    <a:p>
+                      <a:r>
+                        <a:t>0</a:t>
+                      </a:r>
+                    </a:p>
+                  </a:txBody>
+                  <a:tcPr/>
+                </a:tc>
+                <a:tc>
+                  <a:txBody>
+                    <a:bodyPr/>
+                    <a:lstStyle/>
+                    <a:p>
+                      <a:r>
+                        <a:t>0</a:t>
                       </a:r>
                     </a:p>
                   </a:txBody>
@@ -4136,7 +4113,18 @@
                     <a:lstStyle/>
                     <a:p>
                       <a:r>
-                        <a:rPr sz="1100"/>
+                        <a:t>YemekSepetiSearchTest</a:t>
+                      </a:r>
+                    </a:p>
+                  </a:txBody>
+                  <a:tcPr/>
+                </a:tc>
+                <a:tc>
+                  <a:txBody>
+                    <a:bodyPr/>
+                    <a:lstStyle/>
+                    <a:p>
+                      <a:r>
                         <a:t>2</a:t>
                       </a:r>
                     </a:p>
@@ -4149,47 +4137,31 @@
                     <a:lstStyle/>
                     <a:p>
                       <a:r>
-                        <a:rPr sz="1100"/>
-                        <a:t>YemekSepetiSearchTest</a:t>
-                      </a:r>
-                    </a:p>
-                  </a:txBody>
-                  <a:tcPr/>
-                </a:tc>
-                <a:tc>
-                  <a:txBody>
-                    <a:bodyPr/>
-                    <a:lstStyle/>
-                    <a:p>
-                      <a:r>
-                        <a:rPr sz="1100"/>
-                        <a:t>scenario2_topbarSearchAndDetail</a:t>
-                      </a:r>
-                    </a:p>
-                  </a:txBody>
-                  <a:tcPr/>
-                </a:tc>
-                <a:tc>
-                  <a:txBody>
-                    <a:bodyPr/>
-                    <a:lstStyle/>
-                    <a:p>
-                      <a:r>
-                        <a:rPr sz="1100"/>
-                        <a:t>PASS</a:t>
-                      </a:r>
-                    </a:p>
-                  </a:txBody>
-                  <a:tcPr/>
-                </a:tc>
-                <a:tc>
-                  <a:txBody>
-                    <a:bodyPr/>
-                    <a:lstStyle/>
-                    <a:p>
-                      <a:r>
-                        <a:rPr sz="1100"/>
-                        <a:t>~28 s</a:t>
+                        <a:t>2</a:t>
+                      </a:r>
+                    </a:p>
+                  </a:txBody>
+                  <a:tcPr/>
+                </a:tc>
+                <a:tc>
+                  <a:txBody>
+                    <a:bodyPr/>
+                    <a:lstStyle/>
+                    <a:p>
+                      <a:r>
+                        <a:t>0</a:t>
+                      </a:r>
+                    </a:p>
+                  </a:txBody>
+                  <a:tcPr/>
+                </a:tc>
+                <a:tc>
+                  <a:txBody>
+                    <a:bodyPr/>
+                    <a:lstStyle/>
+                    <a:p>
+                      <a:r>
+                        <a:t>0</a:t>
                       </a:r>
                     </a:p>
                   </a:txBody>
@@ -4203,60 +4175,55 @@
                     <a:lstStyle/>
                     <a:p>
                       <a:r>
-                        <a:rPr sz="1100"/>
-                        <a:t>3</a:t>
-                      </a:r>
-                    </a:p>
-                  </a:txBody>
-                  <a:tcPr/>
-                </a:tc>
-                <a:tc>
-                  <a:txBody>
-                    <a:bodyPr/>
-                    <a:lstStyle/>
-                    <a:p>
-                      <a:r>
-                        <a:rPr sz="1100"/>
-                        <a:t>YemekSepetiPayTest</a:t>
-                      </a:r>
-                    </a:p>
-                  </a:txBody>
-                  <a:tcPr/>
-                </a:tc>
-                <a:tc>
-                  <a:txBody>
-                    <a:bodyPr/>
-                    <a:lstStyle/>
-                    <a:p>
-                      <a:r>
-                        <a:rPr sz="1100"/>
-                        <a:t>scenario1_addressModalNewAddress</a:t>
-                      </a:r>
-                    </a:p>
-                  </a:txBody>
-                  <a:tcPr/>
-                </a:tc>
-                <a:tc>
-                  <a:txBody>
-                    <a:bodyPr/>
-                    <a:lstStyle/>
-                    <a:p>
-                      <a:r>
-                        <a:rPr sz="1100"/>
-                        <a:t>PASS</a:t>
-                      </a:r>
-                    </a:p>
-                  </a:txBody>
-                  <a:tcPr/>
-                </a:tc>
-                <a:tc>
-                  <a:txBody>
-                    <a:bodyPr/>
-                    <a:lstStyle/>
-                    <a:p>
-                      <a:r>
-                        <a:rPr sz="1100"/>
-                        <a:t>~22 s</a:t>
+                        <a:t>YemekSepetiCartTest</a:t>
+                      </a:r>
+                    </a:p>
+                  </a:txBody>
+                  <a:tcPr/>
+                </a:tc>
+                <a:tc>
+                  <a:txBody>
+                    <a:bodyPr/>
+                    <a:lstStyle/>
+                    <a:p>
+                      <a:r>
+                        <a:t>1</a:t>
+                      </a:r>
+                    </a:p>
+                  </a:txBody>
+                  <a:tcPr/>
+                </a:tc>
+                <a:tc>
+                  <a:txBody>
+                    <a:bodyPr/>
+                    <a:lstStyle/>
+                    <a:p>
+                      <a:r>
+                        <a:t>0</a:t>
+                      </a:r>
+                    </a:p>
+                  </a:txBody>
+                  <a:tcPr/>
+                </a:tc>
+                <a:tc>
+                  <a:txBody>
+                    <a:bodyPr/>
+                    <a:lstStyle/>
+                    <a:p>
+                      <a:r>
+                        <a:t>1</a:t>
+                      </a:r>
+                    </a:p>
+                  </a:txBody>
+                  <a:tcPr/>
+                </a:tc>
+                <a:tc>
+                  <a:txBody>
+                    <a:bodyPr/>
+                    <a:lstStyle/>
+                    <a:p>
+                      <a:r>
+                        <a:t>0</a:t>
                       </a:r>
                     </a:p>
                   </a:txBody>
@@ -4270,20 +4237,6 @@
                     <a:lstStyle/>
                     <a:p>
                       <a:r>
-                        <a:rPr sz="1100"/>
-                        <a:t>4</a:t>
-                      </a:r>
-                    </a:p>
-                  </a:txBody>
-                  <a:tcPr/>
-                </a:tc>
-                <a:tc>
-                  <a:txBody>
-                    <a:bodyPr/>
-                    <a:lstStyle/>
-                    <a:p>
-                      <a:r>
-                        <a:rPr sz="1100"/>
                         <a:t>YemekSepetiPayTest</a:t>
                       </a:r>
                     </a:p>
@@ -4296,34 +4249,43 @@
                     <a:lstStyle/>
                     <a:p>
                       <a:r>
-                        <a:rPr sz="1100"/>
-                        <a:t>scenario2_paymentMethodFiltersAreSelectable</a:t>
-                      </a:r>
-                    </a:p>
-                  </a:txBody>
-                  <a:tcPr/>
-                </a:tc>
-                <a:tc>
-                  <a:txBody>
-                    <a:bodyPr/>
-                    <a:lstStyle/>
-                    <a:p>
-                      <a:r>
-                        <a:rPr sz="1100"/>
-                        <a:t>PASS</a:t>
-                      </a:r>
-                    </a:p>
-                  </a:txBody>
-                  <a:tcPr/>
-                </a:tc>
-                <a:tc>
-                  <a:txBody>
-                    <a:bodyPr/>
-                    <a:lstStyle/>
-                    <a:p>
-                      <a:r>
-                        <a:rPr sz="1100"/>
-                        <a:t>~23 s</a:t>
+                        <a:t>3</a:t>
+                      </a:r>
+                    </a:p>
+                  </a:txBody>
+                  <a:tcPr/>
+                </a:tc>
+                <a:tc>
+                  <a:txBody>
+                    <a:bodyPr/>
+                    <a:lstStyle/>
+                    <a:p>
+                      <a:r>
+                        <a:t>2</a:t>
+                      </a:r>
+                    </a:p>
+                  </a:txBody>
+                  <a:tcPr/>
+                </a:tc>
+                <a:tc>
+                  <a:txBody>
+                    <a:bodyPr/>
+                    <a:lstStyle/>
+                    <a:p>
+                      <a:r>
+                        <a:t>0</a:t>
+                      </a:r>
+                    </a:p>
+                  </a:txBody>
+                  <a:tcPr/>
+                </a:tc>
+                <a:tc>
+                  <a:txBody>
+                    <a:bodyPr/>
+                    <a:lstStyle/>
+                    <a:p>
+                      <a:r>
+                        <a:t>1</a:t>
                       </a:r>
                     </a:p>
                   </a:txBody>
@@ -4337,60 +4299,55 @@
                     <a:lstStyle/>
                     <a:p>
                       <a:r>
-                        <a:rPr sz="1100"/>
-                        <a:t>5</a:t>
-                      </a:r>
-                    </a:p>
-                  </a:txBody>
-                  <a:tcPr/>
-                </a:tc>
-                <a:tc>
-                  <a:txBody>
-                    <a:bodyPr/>
-                    <a:lstStyle/>
-                    <a:p>
-                      <a:r>
-                        <a:rPr sz="1100"/>
-                        <a:t>YemekSepetiCartTest</a:t>
-                      </a:r>
-                    </a:p>
-                  </a:txBody>
-                  <a:tcPr/>
-                </a:tc>
-                <a:tc>
-                  <a:txBody>
-                    <a:bodyPr/>
-                    <a:lstStyle/>
-                    <a:p>
-                      <a:r>
-                        <a:rPr sz="1100"/>
-                        <a:t>cartAddIncrementDecrementRemove</a:t>
-                      </a:r>
-                    </a:p>
-                  </a:txBody>
-                  <a:tcPr/>
-                </a:tc>
-                <a:tc>
-                  <a:txBody>
-                    <a:bodyPr/>
-                    <a:lstStyle/>
-                    <a:p>
-                      <a:r>
-                        <a:rPr sz="1100"/>
-                        <a:t>PASS</a:t>
-                      </a:r>
-                    </a:p>
-                  </a:txBody>
-                  <a:tcPr/>
-                </a:tc>
-                <a:tc>
-                  <a:txBody>
-                    <a:bodyPr/>
-                    <a:lstStyle/>
-                    <a:p>
-                      <a:r>
-                        <a:rPr sz="1100"/>
-                        <a:t>~59 s</a:t>
+                        <a:t>Total</a:t>
+                      </a:r>
+                    </a:p>
+                  </a:txBody>
+                  <a:tcPr/>
+                </a:tc>
+                <a:tc>
+                  <a:txBody>
+                    <a:bodyPr/>
+                    <a:lstStyle/>
+                    <a:p>
+                      <a:r>
+                        <a:t>8</a:t>
+                      </a:r>
+                    </a:p>
+                  </a:txBody>
+                  <a:tcPr/>
+                </a:tc>
+                <a:tc>
+                  <a:txBody>
+                    <a:bodyPr/>
+                    <a:lstStyle/>
+                    <a:p>
+                      <a:r>
+                        <a:t>6</a:t>
+                      </a:r>
+                    </a:p>
+                  </a:txBody>
+                  <a:tcPr/>
+                </a:tc>
+                <a:tc>
+                  <a:txBody>
+                    <a:bodyPr/>
+                    <a:lstStyle/>
+                    <a:p>
+                      <a:r>
+                        <a:t>1</a:t>
+                      </a:r>
+                    </a:p>
+                  </a:txBody>
+                  <a:tcPr/>
+                </a:tc>
+                <a:tc>
+                  <a:txBody>
+                    <a:bodyPr/>
+                    <a:lstStyle/>
+                    <a:p>
+                      <a:r>
+                        <a:t>1</a:t>
                       </a:r>
                     </a:p>
                   </a:txBody>
@@ -4426,7 +4383,7 @@
             <a:pPr algn="l"/>
             <a:r>
               <a:rPr sz="1600" b="1"/>
-              <a:t>Aggregate: 5 / 5 passing — 0 logic failures.</a:t>
+              <a:t>Aggregate: 6 / 8 passing — 1 fail and 1 error driven by account/address data, not application defects.</a:t>
             </a:r>
           </a:p>
         </p:txBody>
@@ -4466,7 +4423,7 @@
           <a:p>
             <a:r>
               <a:rPr b="1"/>
-              <a:t>BLACK-BOX FINDINGS &amp; GAPS</a:t>
+              <a:t>BLACK-BOX FINDINGS, GAPS &amp; SECONDARY TOOLS</a:t>
             </a:r>
           </a:p>
         </p:txBody>
@@ -4489,42 +4446,42 @@
             <a:pPr/>
             <a:r>
               <a:rPr sz="1800"/>
-              <a:t>Defects observed: none on the happy path during the recorded run.</a:t>
+              <a:t>0 application defects found in the system under test (TEST_REPORT.md §3.4).</a:t>
             </a:r>
           </a:p>
           <a:p>
             <a:pPr/>
             <a:r>
               <a:rPr sz="1800"/>
-              <a:t>Gaps:</a:t>
-            </a:r>
-          </a:p>
-          <a:p>
-            <a:pPr lvl="1"/>
-            <a:r>
-              <a:rPr sz="1800"/>
-              <a:t>Mobile address-book editing partially behind login on web — verified at API-id level only.</a:t>
-            </a:r>
-          </a:p>
-          <a:p>
-            <a:pPr lvl="1"/>
-            <a:r>
-              <a:rPr sz="1800"/>
-              <a:t>Anti-bot (PerimeterX) interferes with unattended runs; mitigated via persistent profile pre-warm.</a:t>
+              <a:t>CartTest fail / PayTest scenario3 error: account had no deliverable address for the express-lane restaurants.</a:t>
             </a:r>
           </a:p>
           <a:p>
             <a:pPr/>
             <a:r>
               <a:rPr sz="1800"/>
-              <a:t>Test data is synthetic only (test_plan.pdf §3.9).</a:t>
+              <a:t>Selenium IDE on Firefox — 12 / 15 pass (~80%); login &amp; special-character search were unstable.</a:t>
             </a:r>
           </a:p>
           <a:p>
             <a:pPr/>
             <a:r>
               <a:rPr sz="1800"/>
-              <a:t>Cart assertions are price-agnostic — verify the math, not literal TL strings.</a:t>
+              <a:t>Maestro mobile — Login / Register blocked by anti-screenshot security; remaining flows verified.</a:t>
+            </a:r>
+          </a:p>
+          <a:p>
+            <a:pPr/>
+            <a:r>
+              <a:rPr sz="1800"/>
+              <a:t>Anti-bot (PerimeterX) is mitigated by the persistent profile pre-warm and Buster captcha auto-click.</a:t>
+            </a:r>
+          </a:p>
+          <a:p>
+            <a:pPr/>
+            <a:r>
+              <a:rPr sz="1800"/>
+              <a:t>Test data is synthetic only (test_plan.pdf §3.9); cart assertions verify math, not literal TL strings.</a:t>
             </a:r>
           </a:p>
         </p:txBody>
@@ -4649,7 +4606,7 @@
             <a:pPr/>
             <a:r>
               <a:rPr sz="1800"/>
-              <a:t>Test levels: Unit + Integration.</a:t>
+              <a:t>Test level: Unit + Integration (structural / white-box).</a:t>
             </a:r>
           </a:p>
           <a:p>
@@ -4663,7 +4620,7 @@
             <a:pPr lvl="1"/>
             <a:r>
               <a:rPr sz="1800"/>
-              <a:t>routes/index.js — CRUD + pagination + search</a:t>
+              <a:t>routes/index.js — CRUD + pagination + search (V(G) summed = 17)</a:t>
             </a:r>
           </a:p>
           <a:p>
@@ -4677,28 +4634,35 @@
             <a:pPr lvl="1"/>
             <a:r>
               <a:rPr sz="1800"/>
-              <a:t>errorHandlers.js — 404 and global error</a:t>
+              <a:t>errorHandlers.js — fourOhFour + globalError middleware</a:t>
             </a:r>
           </a:p>
           <a:p>
             <a:pPr lvl="1"/>
             <a:r>
               <a:rPr sz="1800"/>
-              <a:t>app.js + bin/www — middleware order, server bootstrap</a:t>
+              <a:t>app.js — middleware order, sequelize sync IIFE</a:t>
             </a:r>
           </a:p>
           <a:p>
             <a:pPr/>
             <a:r>
               <a:rPr sz="1800"/>
-              <a:t>Test framework: Jest with in-memory SQLite for isolation.</a:t>
+              <a:t>Test framework: Jest 30.3.0 + supertest, in-memory SQLite (force-sync per beforeAll).</a:t>
             </a:r>
           </a:p>
           <a:p>
             <a:pPr/>
             <a:r>
               <a:rPr sz="1800"/>
-              <a:t>Mutation framework: Stryker v7.3.0 (Node.js v18 LTS).</a:t>
+              <a:t>Mutation framework: Stryker 7.3.0 with coverageAnalysis: 'perTest', ignoreStatic: true.</a:t>
+            </a:r>
+          </a:p>
+          <a:p>
+            <a:pPr/>
+            <a:r>
+              <a:rPr sz="1800"/>
+              <a:t>Techniques: SC, Branch, Basis Path (V(G)), BVA, Data-Flow — one dedicated test file each.</a:t>
             </a:r>
           </a:p>
         </p:txBody>
@@ -4738,7 +4702,7 @@
           <a:p>
             <a:r>
               <a:rPr b="1"/>
-              <a:t>WHITE-BOX COVERAGE</a:t>
+              <a:t>WHITE-BOX COVERAGE — Jest / istanbul</a:t>
             </a:r>
           </a:p>
         </p:txBody>
@@ -4774,12 +4738,7 @@
                     <a:lstStyle/>
                     <a:p>
                       <a:r>
-                        <a:rPr b="1" sz="1200">
-                          <a:solidFill>
-                            <a:srgbClr val="FFFFFF"/>
-                          </a:solidFill>
-                        </a:rPr>
-                        <a:t>Component</a:t>
+                        <a:t>File</a:t>
                       </a:r>
                     </a:p>
                   </a:txBody>
@@ -4795,12 +4754,7 @@
                     <a:lstStyle/>
                     <a:p>
                       <a:r>
-                        <a:rPr b="1" sz="1200">
-                          <a:solidFill>
-                            <a:srgbClr val="FFFFFF"/>
-                          </a:solidFill>
-                        </a:rPr>
-                        <a:t>Line coverage</a:t>
+                        <a:t>% Stmts</a:t>
                       </a:r>
                     </a:p>
                   </a:txBody>
@@ -4816,12 +4770,7 @@
                     <a:lstStyle/>
                     <a:p>
                       <a:r>
-                        <a:rPr b="1" sz="1200">
-                          <a:solidFill>
-                            <a:srgbClr val="FFFFFF"/>
-                          </a:solidFill>
-                        </a:rPr>
-                        <a:t>Branch coverage</a:t>
+                        <a:t>% Branch</a:t>
                       </a:r>
                     </a:p>
                   </a:txBody>
@@ -4837,12 +4786,7 @@
                     <a:lstStyle/>
                     <a:p>
                       <a:r>
-                        <a:rPr b="1" sz="1200">
-                          <a:solidFill>
-                            <a:srgbClr val="FFFFFF"/>
-                          </a:solidFill>
-                        </a:rPr>
-                        <a:t>Tests</a:t>
+                        <a:t>% Lines</a:t>
                       </a:r>
                     </a:p>
                   </a:txBody>
@@ -4860,47 +4804,43 @@
                     <a:lstStyle/>
                     <a:p>
                       <a:r>
-                        <a:rPr sz="1100"/>
-                        <a:t>routes/index.js</a:t>
-                      </a:r>
-                    </a:p>
-                  </a:txBody>
-                  <a:tcPr/>
-                </a:tc>
-                <a:tc>
-                  <a:txBody>
-                    <a:bodyPr/>
-                    <a:lstStyle/>
-                    <a:p>
-                      <a:r>
-                        <a:rPr sz="1100"/>
-                        <a:t>92%</a:t>
-                      </a:r>
-                    </a:p>
-                  </a:txBody>
-                  <a:tcPr/>
-                </a:tc>
-                <a:tc>
-                  <a:txBody>
-                    <a:bodyPr/>
-                    <a:lstStyle/>
-                    <a:p>
-                      <a:r>
-                        <a:rPr sz="1100"/>
-                        <a:t>85%</a:t>
-                      </a:r>
-                    </a:p>
-                  </a:txBody>
-                  <a:tcPr/>
-                </a:tc>
-                <a:tc>
-                  <a:txBody>
-                    <a:bodyPr/>
-                    <a:lstStyle/>
-                    <a:p>
-                      <a:r>
-                        <a:rPr sz="1100"/>
-                        <a:t>18</a:t>
+                        <a:t>All files (overall)</a:t>
+                      </a:r>
+                    </a:p>
+                  </a:txBody>
+                  <a:tcPr/>
+                </a:tc>
+                <a:tc>
+                  <a:txBody>
+                    <a:bodyPr/>
+                    <a:lstStyle/>
+                    <a:p>
+                      <a:r>
+                        <a:t>98.26</a:t>
+                      </a:r>
+                    </a:p>
+                  </a:txBody>
+                  <a:tcPr/>
+                </a:tc>
+                <a:tc>
+                  <a:txBody>
+                    <a:bodyPr/>
+                    <a:lstStyle/>
+                    <a:p>
+                      <a:r>
+                        <a:t>82.60</a:t>
+                      </a:r>
+                    </a:p>
+                  </a:txBody>
+                  <a:tcPr/>
+                </a:tc>
+                <a:tc>
+                  <a:txBody>
+                    <a:bodyPr/>
+                    <a:lstStyle/>
+                    <a:p>
+                      <a:r>
+                        <a:t>98.23</a:t>
                       </a:r>
                     </a:p>
                   </a:txBody>
@@ -4914,47 +4854,43 @@
                     <a:lstStyle/>
                     <a:p>
                       <a:r>
-                        <a:rPr sz="1100"/>
-                        <a:t>models/book.js</a:t>
-                      </a:r>
-                    </a:p>
-                  </a:txBody>
-                  <a:tcPr/>
-                </a:tc>
-                <a:tc>
-                  <a:txBody>
-                    <a:bodyPr/>
-                    <a:lstStyle/>
-                    <a:p>
-                      <a:r>
-                        <a:rPr sz="1100"/>
-                        <a:t>95%</a:t>
-                      </a:r>
-                    </a:p>
-                  </a:txBody>
-                  <a:tcPr/>
-                </a:tc>
-                <a:tc>
-                  <a:txBody>
-                    <a:bodyPr/>
-                    <a:lstStyle/>
-                    <a:p>
-                      <a:r>
-                        <a:rPr sz="1100"/>
-                        <a:t>90%</a:t>
-                      </a:r>
-                    </a:p>
-                  </a:txBody>
-                  <a:tcPr/>
-                </a:tc>
-                <a:tc>
-                  <a:txBody>
-                    <a:bodyPr/>
-                    <a:lstStyle/>
-                    <a:p>
-                      <a:r>
-                        <a:rPr sz="1100"/>
-                        <a:t>8</a:t>
+                        <a:t>routes/index.js</a:t>
+                      </a:r>
+                    </a:p>
+                  </a:txBody>
+                  <a:tcPr/>
+                </a:tc>
+                <a:tc>
+                  <a:txBody>
+                    <a:bodyPr/>
+                    <a:lstStyle/>
+                    <a:p>
+                      <a:r>
+                        <a:t>100.00</a:t>
+                      </a:r>
+                    </a:p>
+                  </a:txBody>
+                  <a:tcPr/>
+                </a:tc>
+                <a:tc>
+                  <a:txBody>
+                    <a:bodyPr/>
+                    <a:lstStyle/>
+                    <a:p>
+                      <a:r>
+                        <a:t>100.00</a:t>
+                      </a:r>
+                    </a:p>
+                  </a:txBody>
+                  <a:tcPr/>
+                </a:tc>
+                <a:tc>
+                  <a:txBody>
+                    <a:bodyPr/>
+                    <a:lstStyle/>
+                    <a:p>
+                      <a:r>
+                        <a:t>100.00</a:t>
                       </a:r>
                     </a:p>
                   </a:txBody>
@@ -4968,47 +4904,43 @@
                     <a:lstStyle/>
                     <a:p>
                       <a:r>
-                        <a:rPr sz="1100"/>
-                        <a:t>errorHandlers.js</a:t>
-                      </a:r>
-                    </a:p>
-                  </a:txBody>
-                  <a:tcPr/>
-                </a:tc>
-                <a:tc>
-                  <a:txBody>
-                    <a:bodyPr/>
-                    <a:lstStyle/>
-                    <a:p>
-                      <a:r>
-                        <a:rPr sz="1100"/>
-                        <a:t>100%</a:t>
-                      </a:r>
-                    </a:p>
-                  </a:txBody>
-                  <a:tcPr/>
-                </a:tc>
-                <a:tc>
-                  <a:txBody>
-                    <a:bodyPr/>
-                    <a:lstStyle/>
-                    <a:p>
-                      <a:r>
-                        <a:rPr sz="1100"/>
-                        <a:t>95%</a:t>
-                      </a:r>
-                    </a:p>
-                  </a:txBody>
-                  <a:tcPr/>
-                </a:tc>
-                <a:tc>
-                  <a:txBody>
-                    <a:bodyPr/>
-                    <a:lstStyle/>
-                    <a:p>
-                      <a:r>
-                        <a:rPr sz="1100"/>
-                        <a:t>6</a:t>
+                        <a:t>models/book.js</a:t>
+                      </a:r>
+                    </a:p>
+                  </a:txBody>
+                  <a:tcPr/>
+                </a:tc>
+                <a:tc>
+                  <a:txBody>
+                    <a:bodyPr/>
+                    <a:lstStyle/>
+                    <a:p>
+                      <a:r>
+                        <a:t>100.00</a:t>
+                      </a:r>
+                    </a:p>
+                  </a:txBody>
+                  <a:tcPr/>
+                </a:tc>
+                <a:tc>
+                  <a:txBody>
+                    <a:bodyPr/>
+                    <a:lstStyle/>
+                    <a:p>
+                      <a:r>
+                        <a:t>100.00</a:t>
+                      </a:r>
+                    </a:p>
+                  </a:txBody>
+                  <a:tcPr/>
+                </a:tc>
+                <a:tc>
+                  <a:txBody>
+                    <a:bodyPr/>
+                    <a:lstStyle/>
+                    <a:p>
+                      <a:r>
+                        <a:t>100.00</a:t>
                       </a:r>
                     </a:p>
                   </a:txBody>
@@ -5022,47 +4954,43 @@
                     <a:lstStyle/>
                     <a:p>
                       <a:r>
-                        <a:rPr sz="1100"/>
-                        <a:t>app.js</a:t>
-                      </a:r>
-                    </a:p>
-                  </a:txBody>
-                  <a:tcPr/>
-                </a:tc>
-                <a:tc>
-                  <a:txBody>
-                    <a:bodyPr/>
-                    <a:lstStyle/>
-                    <a:p>
-                      <a:r>
-                        <a:rPr sz="1100"/>
-                        <a:t>88%</a:t>
-                      </a:r>
-                    </a:p>
-                  </a:txBody>
-                  <a:tcPr/>
-                </a:tc>
-                <a:tc>
-                  <a:txBody>
-                    <a:bodyPr/>
-                    <a:lstStyle/>
-                    <a:p>
-                      <a:r>
-                        <a:rPr sz="1100"/>
-                        <a:t>75%</a:t>
-                      </a:r>
-                    </a:p>
-                  </a:txBody>
-                  <a:tcPr/>
-                </a:tc>
-                <a:tc>
-                  <a:txBody>
-                    <a:bodyPr/>
-                    <a:lstStyle/>
-                    <a:p>
-                      <a:r>
-                        <a:rPr sz="1100"/>
-                        <a:t>5</a:t>
+                        <a:t>errorHandlers.js</a:t>
+                      </a:r>
+                    </a:p>
+                  </a:txBody>
+                  <a:tcPr/>
+                </a:tc>
+                <a:tc>
+                  <a:txBody>
+                    <a:bodyPr/>
+                    <a:lstStyle/>
+                    <a:p>
+                      <a:r>
+                        <a:t>100.00</a:t>
+                      </a:r>
+                    </a:p>
+                  </a:txBody>
+                  <a:tcPr/>
+                </a:tc>
+                <a:tc>
+                  <a:txBody>
+                    <a:bodyPr/>
+                    <a:lstStyle/>
+                    <a:p>
+                      <a:r>
+                        <a:t>83.33</a:t>
+                      </a:r>
+                    </a:p>
+                  </a:txBody>
+                  <a:tcPr/>
+                </a:tc>
+                <a:tc>
+                  <a:txBody>
+                    <a:bodyPr/>
+                    <a:lstStyle/>
+                    <a:p>
+                      <a:r>
+                        <a:t>100.00</a:t>
                       </a:r>
                     </a:p>
                   </a:txBody>
@@ -5076,47 +5004,43 @@
                     <a:lstStyle/>
                     <a:p>
                       <a:r>
-                        <a:rPr sz="1100"/>
-                        <a:t>mutation.test.js (extra robustness)</a:t>
-                      </a:r>
-                    </a:p>
-                  </a:txBody>
-                  <a:tcPr/>
-                </a:tc>
-                <a:tc>
-                  <a:txBody>
-                    <a:bodyPr/>
-                    <a:lstStyle/>
-                    <a:p>
-                      <a:r>
-                        <a:rPr sz="1100"/>
-                        <a:t>—</a:t>
-                      </a:r>
-                    </a:p>
-                  </a:txBody>
-                  <a:tcPr/>
-                </a:tc>
-                <a:tc>
-                  <a:txBody>
-                    <a:bodyPr/>
-                    <a:lstStyle/>
-                    <a:p>
-                      <a:r>
-                        <a:rPr sz="1100"/>
-                        <a:t>—</a:t>
-                      </a:r>
-                    </a:p>
-                  </a:txBody>
-                  <a:tcPr/>
-                </a:tc>
-                <a:tc>
-                  <a:txBody>
-                    <a:bodyPr/>
-                    <a:lstStyle/>
-                    <a:p>
-                      <a:r>
-                        <a:rPr sz="1100"/>
-                        <a:t>13</a:t>
+                        <a:t>app.js</a:t>
+                      </a:r>
+                    </a:p>
+                  </a:txBody>
+                  <a:tcPr/>
+                </a:tc>
+                <a:tc>
+                  <a:txBody>
+                    <a:bodyPr/>
+                    <a:lstStyle/>
+                    <a:p>
+                      <a:r>
+                        <a:t>96.15</a:t>
+                      </a:r>
+                    </a:p>
+                  </a:txBody>
+                  <a:tcPr/>
+                </a:tc>
+                <a:tc>
+                  <a:txBody>
+                    <a:bodyPr/>
+                    <a:lstStyle/>
+                    <a:p>
+                      <a:r>
+                        <a:t>100.00</a:t>
+                      </a:r>
+                    </a:p>
+                  </a:txBody>
+                  <a:tcPr/>
+                </a:tc>
+                <a:tc>
+                  <a:txBody>
+                    <a:bodyPr/>
+                    <a:lstStyle/>
+                    <a:p>
+                      <a:r>
+                        <a:t>96.15</a:t>
                       </a:r>
                     </a:p>
                   </a:txBody>
@@ -5130,47 +5054,43 @@
                     <a:lstStyle/>
                     <a:p>
                       <a:r>
-                        <a:rPr sz="1100"/>
-                        <a:t>Overall</a:t>
-                      </a:r>
-                    </a:p>
-                  </a:txBody>
-                  <a:tcPr/>
-                </a:tc>
-                <a:tc>
-                  <a:txBody>
-                    <a:bodyPr/>
-                    <a:lstStyle/>
-                    <a:p>
-                      <a:r>
-                        <a:rPr sz="1100"/>
-                        <a:t>~92%</a:t>
-                      </a:r>
-                    </a:p>
-                  </a:txBody>
-                  <a:tcPr/>
-                </a:tc>
-                <a:tc>
-                  <a:txBody>
-                    <a:bodyPr/>
-                    <a:lstStyle/>
-                    <a:p>
-                      <a:r>
-                        <a:rPr sz="1100"/>
-                        <a:t>~85%</a:t>
-                      </a:r>
-                    </a:p>
-                  </a:txBody>
-                  <a:tcPr/>
-                </a:tc>
-                <a:tc>
-                  <a:txBody>
-                    <a:bodyPr/>
-                    <a:lstStyle/>
-                    <a:p>
-                      <a:r>
-                        <a:rPr sz="1100"/>
-                        <a:t>50</a:t>
+                        <a:t>models/index.js</a:t>
+                      </a:r>
+                    </a:p>
+                  </a:txBody>
+                  <a:tcPr/>
+                </a:tc>
+                <a:tc>
+                  <a:txBody>
+                    <a:bodyPr/>
+                    <a:lstStyle/>
+                    <a:p>
+                      <a:r>
+                        <a:t>95.00</a:t>
+                      </a:r>
+                    </a:p>
+                  </a:txBody>
+                  <a:tcPr/>
+                </a:tc>
+                <a:tc>
+                  <a:txBody>
+                    <a:bodyPr/>
+                    <a:lstStyle/>
+                    <a:p>
+                      <a:r>
+                        <a:t>66.66</a:t>
+                      </a:r>
+                    </a:p>
+                  </a:txBody>
+                  <a:tcPr/>
+                </a:tc>
+                <a:tc>
+                  <a:txBody>
+                    <a:bodyPr/>
+                    <a:lstStyle/>
+                    <a:p>
+                      <a:r>
+                        <a:t>95.00</a:t>
                       </a:r>
                     </a:p>
                   </a:txBody>
@@ -5206,7 +5126,7 @@
             <a:pPr algn="l"/>
             <a:r>
               <a:rPr sz="1600" b="1"/>
-              <a:t>All 50 Jest tests pass — 0 failures, 0 skipped.</a:t>
+              <a:t>All 152 Jest tests pass (10 suites, ~13.5 s). Targets ≥ 80% / ≥ 75% — both exceeded.</a:t>
             </a:r>
           </a:p>
         </p:txBody>
@@ -5276,7 +5196,7 @@
             <a:pPr algn="l"/>
             <a:r>
               <a:rPr sz="1800" b="1"/>
-              <a:t>Mutation Score = killed / (killed + survived) = 145 / 160 = 90.67%</a:t>
+              <a:t>Mutation Score = (Killed + Timeout) / Tested = 95 / 100 = 95.00%</a:t>
             </a:r>
           </a:p>
         </p:txBody>
@@ -5311,11 +5231,6 @@
                     <a:lstStyle/>
                     <a:p>
                       <a:r>
-                        <a:rPr b="1" sz="1200">
-                          <a:solidFill>
-                            <a:srgbClr val="FFFFFF"/>
-                          </a:solidFill>
-                        </a:rPr>
                         <a:t>Metric</a:t>
                       </a:r>
                     </a:p>
@@ -5332,11 +5247,6 @@
                     <a:lstStyle/>
                     <a:p>
                       <a:r>
-                        <a:rPr b="1" sz="1200">
-                          <a:solidFill>
-                            <a:srgbClr val="FFFFFF"/>
-                          </a:solidFill>
-                        </a:rPr>
                         <a:t>Count</a:t>
                       </a:r>
                     </a:p>
@@ -5353,11 +5263,6 @@
                     <a:lstStyle/>
                     <a:p>
                       <a:r>
-                        <a:rPr b="1" sz="1200">
-                          <a:solidFill>
-                            <a:srgbClr val="FFFFFF"/>
-                          </a:solidFill>
-                        </a:rPr>
                         <a:t>%</a:t>
                       </a:r>
                     </a:p>
@@ -5376,7 +5281,6 @@
                     <a:lstStyle/>
                     <a:p>
                       <a:r>
-                        <a:rPr sz="1100"/>
                         <a:t>Mutants generated</a:t>
                       </a:r>
                     </a:p>
@@ -5389,7 +5293,6 @@
                     <a:lstStyle/>
                     <a:p>
                       <a:r>
-                        <a:rPr sz="1100"/>
                         <a:t>164</a:t>
                       </a:r>
                     </a:p>
@@ -5402,8 +5305,7 @@
                     <a:lstStyle/>
                     <a:p>
                       <a:r>
-                        <a:rPr sz="1100"/>
-                        <a:t>100%</a:t>
+                        <a:t>—</a:t>
                       </a:r>
                     </a:p>
                   </a:txBody>
@@ -5417,34 +5319,31 @@
                     <a:lstStyle/>
                     <a:p>
                       <a:r>
-                        <a:rPr sz="1100"/>
-                        <a:t>Killed (caught by tests)</a:t>
-                      </a:r>
-                    </a:p>
-                  </a:txBody>
-                  <a:tcPr/>
-                </a:tc>
-                <a:tc>
-                  <a:txBody>
-                    <a:bodyPr/>
-                    <a:lstStyle/>
-                    <a:p>
-                      <a:r>
-                        <a:rPr sz="1100"/>
-                        <a:t>145</a:t>
-                      </a:r>
-                    </a:p>
-                  </a:txBody>
-                  <a:tcPr/>
-                </a:tc>
-                <a:tc>
-                  <a:txBody>
-                    <a:bodyPr/>
-                    <a:lstStyle/>
-                    <a:p>
-                      <a:r>
-                        <a:rPr sz="1100"/>
-                        <a:t>88.4%</a:t>
+                        <a:t>Static (ignored, schema)</a:t>
+                      </a:r>
+                    </a:p>
+                  </a:txBody>
+                  <a:tcPr/>
+                </a:tc>
+                <a:tc>
+                  <a:txBody>
+                    <a:bodyPr/>
+                    <a:lstStyle/>
+                    <a:p>
+                      <a:r>
+                        <a:t>64</a:t>
+                      </a:r>
+                    </a:p>
+                  </a:txBody>
+                  <a:tcPr/>
+                </a:tc>
+                <a:tc>
+                  <a:txBody>
+                    <a:bodyPr/>
+                    <a:lstStyle/>
+                    <a:p>
+                      <a:r>
+                        <a:t>—</a:t>
                       </a:r>
                     </a:p>
                   </a:txBody>
@@ -5458,34 +5357,31 @@
                     <a:lstStyle/>
                     <a:p>
                       <a:r>
-                        <a:rPr sz="1100"/>
-                        <a:t>Survived</a:t>
-                      </a:r>
-                    </a:p>
-                  </a:txBody>
-                  <a:tcPr/>
-                </a:tc>
-                <a:tc>
-                  <a:txBody>
-                    <a:bodyPr/>
-                    <a:lstStyle/>
-                    <a:p>
-                      <a:r>
-                        <a:rPr sz="1100"/>
-                        <a:t>14</a:t>
-                      </a:r>
-                    </a:p>
-                  </a:txBody>
-                  <a:tcPr/>
-                </a:tc>
-                <a:tc>
-                  <a:txBody>
-                    <a:bodyPr/>
-                    <a:lstStyle/>
-                    <a:p>
-                      <a:r>
-                        <a:rPr sz="1100"/>
-                        <a:t>8.5%</a:t>
+                        <a:t>Mutants tested</a:t>
+                      </a:r>
+                    </a:p>
+                  </a:txBody>
+                  <a:tcPr/>
+                </a:tc>
+                <a:tc>
+                  <a:txBody>
+                    <a:bodyPr/>
+                    <a:lstStyle/>
+                    <a:p>
+                      <a:r>
+                        <a:t>100</a:t>
+                      </a:r>
+                    </a:p>
+                  </a:txBody>
+                  <a:tcPr/>
+                </a:tc>
+                <a:tc>
+                  <a:txBody>
+                    <a:bodyPr/>
+                    <a:lstStyle/>
+                    <a:p>
+                      <a:r>
+                        <a:t>100%</a:t>
                       </a:r>
                     </a:p>
                   </a:txBody>
@@ -5499,34 +5395,31 @@
                     <a:lstStyle/>
                     <a:p>
                       <a:r>
-                        <a:rPr sz="1100"/>
-                        <a:t>Timed out</a:t>
-                      </a:r>
-                    </a:p>
-                  </a:txBody>
-                  <a:tcPr/>
-                </a:tc>
-                <a:tc>
-                  <a:txBody>
-                    <a:bodyPr/>
-                    <a:lstStyle/>
-                    <a:p>
-                      <a:r>
-                        <a:rPr sz="1100"/>
-                        <a:t>5</a:t>
-                      </a:r>
-                    </a:p>
-                  </a:txBody>
-                  <a:tcPr/>
-                </a:tc>
-                <a:tc>
-                  <a:txBody>
-                    <a:bodyPr/>
-                    <a:lstStyle/>
-                    <a:p>
-                      <a:r>
-                        <a:rPr sz="1100"/>
-                        <a:t>3.0%</a:t>
+                        <a:t>Killed (incl. 13 timeouts)</a:t>
+                      </a:r>
+                    </a:p>
+                  </a:txBody>
+                  <a:tcPr/>
+                </a:tc>
+                <a:tc>
+                  <a:txBody>
+                    <a:bodyPr/>
+                    <a:lstStyle/>
+                    <a:p>
+                      <a:r>
+                        <a:t>95</a:t>
+                      </a:r>
+                    </a:p>
+                  </a:txBody>
+                  <a:tcPr/>
+                </a:tc>
+                <a:tc>
+                  <a:txBody>
+                    <a:bodyPr/>
+                    <a:lstStyle/>
+                    <a:p>
+                      <a:r>
+                        <a:t>95.00%</a:t>
                       </a:r>
                     </a:p>
                   </a:txBody>
@@ -5540,34 +5433,69 @@
                     <a:lstStyle/>
                     <a:p>
                       <a:r>
-                        <a:rPr sz="1100"/>
-                        <a:t>Mutation score (valid mutants)</a:t>
-                      </a:r>
-                    </a:p>
-                  </a:txBody>
-                  <a:tcPr/>
-                </a:tc>
-                <a:tc>
-                  <a:txBody>
-                    <a:bodyPr/>
-                    <a:lstStyle/>
-                    <a:p>
-                      <a:r>
-                        <a:rPr sz="1100"/>
-                        <a:t>145 / 160</a:t>
-                      </a:r>
-                    </a:p>
-                  </a:txBody>
-                  <a:tcPr/>
-                </a:tc>
-                <a:tc>
-                  <a:txBody>
-                    <a:bodyPr/>
-                    <a:lstStyle/>
-                    <a:p>
-                      <a:r>
-                        <a:rPr sz="1100"/>
-                        <a:t>90.67%</a:t>
+                        <a:t>Survived</a:t>
+                      </a:r>
+                    </a:p>
+                  </a:txBody>
+                  <a:tcPr/>
+                </a:tc>
+                <a:tc>
+                  <a:txBody>
+                    <a:bodyPr/>
+                    <a:lstStyle/>
+                    <a:p>
+                      <a:r>
+                        <a:t>0</a:t>
+                      </a:r>
+                    </a:p>
+                  </a:txBody>
+                  <a:tcPr/>
+                </a:tc>
+                <a:tc>
+                  <a:txBody>
+                    <a:bodyPr/>
+                    <a:lstStyle/>
+                    <a:p>
+                      <a:r>
+                        <a:t>0.00%</a:t>
+                      </a:r>
+                    </a:p>
+                  </a:txBody>
+                  <a:tcPr/>
+                </a:tc>
+              </a:tr>
+              <a:tr h="548640">
+                <a:tc>
+                  <a:txBody>
+                    <a:bodyPr/>
+                    <a:lstStyle/>
+                    <a:p>
+                      <a:r>
+                        <a:t>NoCoverage (defensive)</a:t>
+                      </a:r>
+                    </a:p>
+                  </a:txBody>
+                  <a:tcPr/>
+                </a:tc>
+                <a:tc>
+                  <a:txBody>
+                    <a:bodyPr/>
+                    <a:lstStyle/>
+                    <a:p>
+                      <a:r>
+                        <a:t>5</a:t>
+                      </a:r>
+                    </a:p>
+                  </a:txBody>
+                  <a:tcPr/>
+                </a:tc>
+                <a:tc>
+                  <a:txBody>
+                    <a:bodyPr/>
+                    <a:lstStyle/>
+                    <a:p>
+                      <a:r>
+                        <a:t>5.00%</a:t>
                       </a:r>
                     </a:p>
                   </a:txBody>
@@ -5603,7 +5531,7 @@
             <a:pPr algn="l"/>
             <a:r>
               <a:rPr sz="1600" b="0"/>
-              <a:t>Threshold target ≥ 80% — exceeded by 10.67 percentage points.</a:t>
+              <a:t>Threshold target ≥ 80% — exceeded by 15 percentage points; 0 surviving mutants.</a:t>
             </a:r>
           </a:p>
         </p:txBody>
@@ -5643,7 +5571,7 @@
           <a:p>
             <a:r>
               <a:rPr b="1"/>
-              <a:t>SURVIVED MUTANTS — Categories</a:t>
+              <a:t>DEFECT FOUND VIA MUTATION TESTING — WB-D1</a:t>
             </a:r>
           </a:p>
         </p:txBody>
@@ -5666,56 +5594,56 @@
             <a:pPr/>
             <a:r>
               <a:rPr sz="1800"/>
-              <a:t>Boolean operator mutations (5–6) — e.g. &amp;&amp; → || , &gt; → &gt;=</a:t>
+              <a:t>Symptom: 2 mutants on the literal "New Book" survived in routes/index.js.</a:t>
             </a:r>
           </a:p>
           <a:p>
             <a:pPr/>
             <a:r>
               <a:rPr sz="1800"/>
-              <a:t>Optional / edge cases (3–4) — null vs undefined, whitespace vs empty</a:t>
+              <a:t>Investigation: turned out to be EQUIVALENT mutants — no Pug template consumed the title local.</a:t>
             </a:r>
           </a:p>
           <a:p>
             <a:pPr/>
             <a:r>
               <a:rPr sz="1800"/>
-              <a:t>Default-value mutations (2–3) — default parameter / constant changes</a:t>
+              <a:t>Root cause: views/layout.pug never rendered title= title in &lt;head&gt;.</a:t>
             </a:r>
           </a:p>
           <a:p>
             <a:pPr/>
             <a:r>
               <a:rPr sz="1800"/>
-              <a:t>Timeout cases (5) — 60 s budget exceeded; possible long async loops</a:t>
+              <a:t>Fix: render the local in layout.pug; add matching assertions in routes.test.js.</a:t>
             </a:r>
           </a:p>
           <a:p>
             <a:pPr/>
             <a:r>
               <a:rPr sz="1800"/>
-              <a:t>Action plan:</a:t>
+              <a:t>Result: both mutants now killed; mutation score lifted from 93.00% → 95.00%.</a:t>
+            </a:r>
+          </a:p>
+          <a:p>
+            <a:pPr/>
+            <a:r>
+              <a:rPr sz="1800"/>
+              <a:t>Lesson: mutation testing surfaces dead code, not just weak tests.</a:t>
+            </a:r>
+          </a:p>
+          <a:p>
+            <a:pPr/>
+            <a:r>
+              <a:rPr sz="1800"/>
+              <a:t>5 NoCoverage mutants remain on defensive / fault-injection paths (app.js L24, models/index.js L14) — accepted.</a:t>
             </a:r>
           </a:p>
           <a:p>
             <a:pPr lvl="1"/>
             <a:r>
               <a:rPr sz="1800"/>
-              <a:t>Add boundary value tests (0, -1, empty, whitespace-only)</a:t>
-            </a:r>
-          </a:p>
-          <a:p>
-            <a:pPr lvl="1"/>
-            <a:r>
-              <a:rPr sz="1800"/>
-              <a:t>Add boolean-combination tests around pagination math</a:t>
-            </a:r>
-          </a:p>
-          <a:p>
-            <a:pPr lvl="1"/>
-            <a:r>
-              <a:rPr sz="1800"/>
-              <a:t>Raise timeout to 120 s for long async tests</a:t>
+              <a:t/>
             </a:r>
           </a:p>
         </p:txBody>
@@ -5925,14 +5853,21 @@
             <a:pPr lvl="1"/>
             <a:r>
               <a:rPr sz="1700"/>
-              <a:t>All five web scenarios pass; mobile flows automated in Maestro.</a:t>
+              <a:t>Web Playwright/JUnit: 6 / 8 PASS on 2026-05-08; the 2 non-passes are profile/address dependencies, not application defects.</a:t>
             </a:r>
           </a:p>
           <a:p>
             <a:pPr lvl="1"/>
             <a:r>
               <a:rPr sz="1700"/>
-              <a:t>Authenticated checkout coverage gated by login — flagged as a gap.</a:t>
+              <a:t>Selenium IDE on Firefox: 12 / 15 PASS (~80%). Maestro mobile: 4 modules covered, Auth blocked by anti-screenshot.</a:t>
+            </a:r>
+          </a:p>
+          <a:p>
+            <a:pPr lvl="1"/>
+            <a:r>
+              <a:rPr sz="1700"/>
+              <a:t>All four techniques exercised: EP, BVA, Use Case, Decision Table.</a:t>
             </a:r>
           </a:p>
           <a:p>
@@ -5946,14 +5881,21 @@
             <a:pPr lvl="1"/>
             <a:r>
               <a:rPr sz="1700"/>
-              <a:t>50 / 50 Jest tests passing; ~92% line / ~85% branch coverage.</a:t>
+              <a:t>152 / 152 Jest tests passing; SC = 98.26%, BC = 82.60%.</a:t>
             </a:r>
           </a:p>
           <a:p>
             <a:pPr lvl="1"/>
             <a:r>
               <a:rPr sz="1700"/>
-              <a:t>Mutation score 90.67% — well above the 80% threshold.</a:t>
+              <a:t>Mutation score 95.00% (100 valid mutants, 0 survivors, 5 NoCoverage on defensive paths).</a:t>
+            </a:r>
+          </a:p>
+          <a:p>
+            <a:pPr lvl="1"/>
+            <a:r>
+              <a:rPr sz="1700"/>
+              <a:t>Mutation testing surfaced one real defect (WB-D1) — fixed at views/layout.pug.</a:t>
             </a:r>
           </a:p>
           <a:p>
@@ -5967,21 +5909,21 @@
             <a:pPr lvl="1"/>
             <a:r>
               <a:rPr sz="1700"/>
-              <a:t>Add a synthetic test account for full checkout-side assertions.</a:t>
+              <a:t>Add a synthetic Yemeksepeti test account with a saved deliverable address to make CartTest unattended.</a:t>
             </a:r>
           </a:p>
           <a:p>
             <a:pPr lvl="1"/>
             <a:r>
               <a:rPr sz="1700"/>
-              <a:t>Push mutation score to ≥ 95% with targeted boundary tests.</a:t>
+              <a:t>Implement registration tests once a synthetic SMS gateway is available.</a:t>
             </a:r>
           </a:p>
           <a:p>
             <a:pPr lvl="1"/>
             <a:r>
               <a:rPr sz="1700"/>
-              <a:t>Wire Jest + Stryker into CI with score thresholds.</a:t>
+              <a:t>Wire Jest + Stryker into CI with score thresholds (SC ≥ 95%, mutation ≥ 95%).</a:t>
             </a:r>
           </a:p>
         </p:txBody>
@@ -6044,35 +5986,49 @@
             <a:pPr/>
             <a:r>
               <a:rPr sz="1800"/>
-              <a:t>Whitebox tests must mirror the actual source — assumption-driven tests caused rework.</a:t>
+              <a:t>Mutation testing surfaces dead code, not just weak tests — "equivalent mutants" pointed to a real bug (WB-D1).</a:t>
             </a:r>
           </a:p>
           <a:p>
             <a:pPr/>
             <a:r>
               <a:rPr sz="1800"/>
-              <a:t>High line coverage ≠ high mutation detection — boundary tests are essential.</a:t>
+              <a:t>High statement coverage ≠ high mutation detection — boundary and decision tests are essential.</a:t>
             </a:r>
           </a:p>
           <a:p>
             <a:pPr/>
             <a:r>
               <a:rPr sz="1800"/>
-              <a:t>Integration tests with a real DB caught issues that mocks would have hidden.</a:t>
+              <a:t>Real Chrome over CDP, not bundled Chromium — anti-bot fingerprinting rejects the Playwright default browser.</a:t>
             </a:r>
           </a:p>
           <a:p>
             <a:pPr/>
             <a:r>
               <a:rPr sz="1800"/>
-              <a:t>Tool-version compatibility matters — Stryker v8 needed Node ≥ 20; we pinned v7.3.0 for Node 18.</a:t>
+              <a:t>data-testid selectors survive UI tweaks far better than CSS-class selectors.</a:t>
             </a:r>
           </a:p>
           <a:p>
             <a:pPr/>
             <a:r>
               <a:rPr sz="1800"/>
-              <a:t>For black-box web automation, data-testid selectors are far more durable than CSS classes.</a:t>
+              <a:t>Tool-version compatibility matters — Stryker 7.3.0 for Node 18; coverageAnalysis: 'perTest' + ignoreStatic: true to score honestly.</a:t>
+            </a:r>
+          </a:p>
+          <a:p>
+            <a:pPr/>
+            <a:r>
+              <a:rPr sz="1800"/>
+              <a:t>Replace literal-price assertions with the math (×2, ½, drain) when the dataset rotates per run.</a:t>
+            </a:r>
+          </a:p>
+          <a:p>
+            <a:pPr/>
+            <a:r>
+              <a:rPr sz="1800"/>
+              <a:t>Plan named techniques (SC, BC, basis path, DFT, mutation) rather than named tools — substitutions stay sound.</a:t>
             </a:r>
           </a:p>
         </p:txBody>
@@ -6533,6 +6489,7 @@
           <a:bodyPr wrap="square"/>
           <a:lstStyle/>
           <a:p>
+            <a:pPr/>
             <a:r>
               <a:rPr b="1" sz="2000"/>
               <a:t>Library-DB-Express (White-Box)</a:t>
@@ -6563,7 +6520,7 @@
             <a:pPr lvl="1"/>
             <a:r>
               <a:rPr sz="1500"/>
-              <a:t>Tested with Jest 50 cases.</a:t>
+              <a:t>Tested with Jest 30.3.0 — 152 test cases (10 suites).</a:t>
             </a:r>
           </a:p>
           <a:p>
@@ -6751,7 +6708,14 @@
             <a:pPr lvl="1"/>
             <a:r>
               <a:rPr sz="1800"/>
-              <a:t>Web: Java + Playwright 1.49 (Selenium-equivalent), JUnit 5.</a:t>
+              <a:t>Web (primary): Java + Playwright 1.49 + JUnit 5, real Chrome via CDP.</a:t>
+            </a:r>
+          </a:p>
+          <a:p>
+            <a:pPr lvl="1"/>
+            <a:r>
+              <a:rPr sz="1800"/>
+              <a:t>Web (secondary): Selenium IDE on Mozilla Firefox.</a:t>
             </a:r>
           </a:p>
           <a:p>
